--- a/03-build/pptx/C4_U4_docente.pptx
+++ b/03-build/pptx/C4_U4_docente.pptx
@@ -4732,7 +4732,6 @@
               <a:srgbClr val="D64550"/>
             </a:solidFill>
           </a:ln>
-          <a:effectLst/>
           <a:effectLst>
             <a:outerShdw blurRad="90000" dist="38000" dir="5400000" rotWithShape="0">
               <a:srgbClr val="20242E">
@@ -4920,7 +4919,6 @@
               <a:srgbClr val="E4E3DE"/>
             </a:solidFill>
           </a:ln>
-          <a:effectLst/>
           <a:effectLst>
             <a:outerShdw blurRad="90000" dist="38000" dir="5400000" rotWithShape="0">
               <a:srgbClr val="20242E">
@@ -5645,7 +5643,6 @@
               <a:srgbClr val="E4E3DE"/>
             </a:solidFill>
           </a:ln>
-          <a:effectLst/>
           <a:effectLst>
             <a:outerShdw blurRad="90000" dist="38000" dir="5400000" rotWithShape="0">
               <a:srgbClr val="20242E">
@@ -5789,7 +5786,6 @@
               <a:srgbClr val="E4E3DE"/>
             </a:solidFill>
           </a:ln>
-          <a:effectLst/>
           <a:effectLst>
             <a:outerShdw blurRad="90000" dist="38000" dir="5400000" rotWithShape="0">
               <a:srgbClr val="20242E">
@@ -5933,7 +5929,6 @@
               <a:srgbClr val="E4E3DE"/>
             </a:solidFill>
           </a:ln>
-          <a:effectLst/>
           <a:effectLst>
             <a:outerShdw blurRad="90000" dist="38000" dir="5400000" rotWithShape="0">
               <a:srgbClr val="20242E">
@@ -6077,7 +6072,6 @@
               <a:srgbClr val="E4E3DE"/>
             </a:solidFill>
           </a:ln>
-          <a:effectLst/>
           <a:effectLst>
             <a:outerShdw blurRad="90000" dist="38000" dir="5400000" rotWithShape="0">
               <a:srgbClr val="20242E">
@@ -6221,7 +6215,6 @@
               <a:srgbClr val="E4E3DE"/>
             </a:solidFill>
           </a:ln>
-          <a:effectLst/>
           <a:effectLst>
             <a:outerShdw blurRad="90000" dist="38000" dir="5400000" rotWithShape="0">
               <a:srgbClr val="20242E">
@@ -6365,7 +6358,6 @@
               <a:srgbClr val="E4E3DE"/>
             </a:solidFill>
           </a:ln>
-          <a:effectLst/>
           <a:effectLst>
             <a:outerShdw blurRad="90000" dist="38000" dir="5400000" rotWithShape="0">
               <a:srgbClr val="20242E">
@@ -6509,7 +6501,6 @@
               <a:srgbClr val="D64550"/>
             </a:solidFill>
           </a:ln>
-          <a:effectLst/>
           <a:effectLst>
             <a:outerShdw blurRad="90000" dist="38000" dir="5400000" rotWithShape="0">
               <a:srgbClr val="20242E">
@@ -7146,7 +7137,6 @@
               <a:srgbClr val="D64550"/>
             </a:solidFill>
           </a:ln>
-          <a:effectLst/>
           <a:effectLst>
             <a:outerShdw blurRad="90000" dist="38000" dir="5400000" rotWithShape="0">
               <a:srgbClr val="20242E">
@@ -7406,7 +7396,6 @@
               <a:srgbClr val="D64550"/>
             </a:solidFill>
           </a:ln>
-          <a:effectLst/>
           <a:effectLst>
             <a:outerShdw blurRad="90000" dist="38000" dir="5400000" rotWithShape="0">
               <a:srgbClr val="20242E">
@@ -8185,7 +8174,6 @@
               <a:srgbClr val="E4E3DE"/>
             </a:solidFill>
           </a:ln>
-          <a:effectLst/>
           <a:effectLst>
             <a:outerShdw blurRad="90000" dist="38000" dir="5400000" rotWithShape="0">
               <a:srgbClr val="20242E">
@@ -8339,7 +8327,6 @@
               <a:srgbClr val="D64550"/>
             </a:solidFill>
           </a:ln>
-          <a:effectLst/>
           <a:effectLst>
             <a:outerShdw blurRad="90000" dist="38000" dir="5400000" rotWithShape="0">
               <a:srgbClr val="20242E">
@@ -8493,7 +8480,6 @@
               <a:srgbClr val="E4E3DE"/>
             </a:solidFill>
           </a:ln>
-          <a:effectLst/>
           <a:effectLst>
             <a:outerShdw blurRad="90000" dist="38000" dir="5400000" rotWithShape="0">
               <a:srgbClr val="20242E">
@@ -8647,7 +8633,6 @@
               <a:srgbClr val="E4E3DE"/>
             </a:solidFill>
           </a:ln>
-          <a:effectLst/>
           <a:effectLst>
             <a:outerShdw blurRad="90000" dist="38000" dir="5400000" rotWithShape="0">
               <a:srgbClr val="20242E">
@@ -8801,7 +8786,6 @@
               <a:srgbClr val="E4E3DE"/>
             </a:solidFill>
           </a:ln>
-          <a:effectLst/>
           <a:effectLst>
             <a:outerShdw blurRad="90000" dist="38000" dir="5400000" rotWithShape="0">
               <a:srgbClr val="20242E">
@@ -8955,7 +8939,6 @@
               <a:srgbClr val="E4E3DE"/>
             </a:solidFill>
           </a:ln>
-          <a:effectLst/>
           <a:effectLst>
             <a:outerShdw blurRad="90000" dist="38000" dir="5400000" rotWithShape="0">
               <a:srgbClr val="20242E">
@@ -9109,7 +9092,6 @@
               <a:srgbClr val="E4E3DE"/>
             </a:solidFill>
           </a:ln>
-          <a:effectLst/>
           <a:effectLst>
             <a:outerShdw blurRad="90000" dist="38000" dir="5400000" rotWithShape="0">
               <a:srgbClr val="20242E">
@@ -9263,7 +9245,6 @@
               <a:srgbClr val="E4E3DE"/>
             </a:solidFill>
           </a:ln>
-          <a:effectLst/>
           <a:effectLst>
             <a:outerShdw blurRad="90000" dist="38000" dir="5400000" rotWithShape="0">
               <a:srgbClr val="20242E">
@@ -9417,7 +9398,6 @@
               <a:srgbClr val="D64550"/>
             </a:solidFill>
           </a:ln>
-          <a:effectLst/>
           <a:effectLst>
             <a:outerShdw blurRad="90000" dist="38000" dir="5400000" rotWithShape="0">
               <a:srgbClr val="20242E">
@@ -9571,7 +9551,6 @@
               <a:srgbClr val="D64550"/>
             </a:solidFill>
           </a:ln>
-          <a:effectLst/>
           <a:effectLst>
             <a:outerShdw blurRad="90000" dist="38000" dir="5400000" rotWithShape="0">
               <a:srgbClr val="20242E">
@@ -10208,7 +10187,6 @@
               <a:srgbClr val="E4E3DE"/>
             </a:solidFill>
           </a:ln>
-          <a:effectLst/>
           <a:effectLst>
             <a:outerShdw blurRad="90000" dist="38000" dir="5400000" rotWithShape="0">
               <a:srgbClr val="20242E">
@@ -10462,7 +10440,6 @@
               <a:srgbClr val="D64550"/>
             </a:solidFill>
           </a:ln>
-          <a:effectLst/>
           <a:effectLst>
             <a:outerShdw blurRad="90000" dist="38000" dir="5400000" rotWithShape="0">
               <a:srgbClr val="20242E">
@@ -11868,7 +11845,6 @@
               <a:srgbClr val="E4E3DE"/>
             </a:solidFill>
           </a:ln>
-          <a:effectLst/>
           <a:effectLst>
             <a:outerShdw blurRad="90000" dist="38000" dir="5400000" rotWithShape="0">
               <a:srgbClr val="20242E">
@@ -12037,7 +12013,6 @@
               <a:srgbClr val="E4E3DE"/>
             </a:solidFill>
           </a:ln>
-          <a:effectLst/>
           <a:effectLst>
             <a:outerShdw blurRad="90000" dist="38000" dir="5400000" rotWithShape="0">
               <a:srgbClr val="20242E">
@@ -12206,7 +12181,6 @@
               <a:srgbClr val="E4E3DE"/>
             </a:solidFill>
           </a:ln>
-          <a:effectLst/>
           <a:effectLst>
             <a:outerShdw blurRad="90000" dist="38000" dir="5400000" rotWithShape="0">
               <a:srgbClr val="20242E">
@@ -12375,7 +12349,6 @@
               <a:srgbClr val="E4E3DE"/>
             </a:solidFill>
           </a:ln>
-          <a:effectLst/>
           <a:effectLst>
             <a:outerShdw blurRad="90000" dist="38000" dir="5400000" rotWithShape="0">
               <a:srgbClr val="20242E">
@@ -12544,7 +12517,6 @@
               <a:srgbClr val="E4E3DE"/>
             </a:solidFill>
           </a:ln>
-          <a:effectLst/>
           <a:effectLst>
             <a:outerShdw blurRad="90000" dist="38000" dir="5400000" rotWithShape="0">
               <a:srgbClr val="20242E">
@@ -12713,7 +12685,6 @@
               <a:srgbClr val="E4E3DE"/>
             </a:solidFill>
           </a:ln>
-          <a:effectLst/>
           <a:effectLst>
             <a:outerShdw blurRad="90000" dist="38000" dir="5400000" rotWithShape="0">
               <a:srgbClr val="20242E">
@@ -12882,7 +12853,6 @@
               <a:srgbClr val="E4E3DE"/>
             </a:solidFill>
           </a:ln>
-          <a:effectLst/>
           <a:effectLst>
             <a:outerShdw blurRad="90000" dist="38000" dir="5400000" rotWithShape="0">
               <a:srgbClr val="20242E">
@@ -13051,7 +13021,6 @@
               <a:srgbClr val="E4E3DE"/>
             </a:solidFill>
           </a:ln>
-          <a:effectLst/>
           <a:effectLst>
             <a:outerShdw blurRad="90000" dist="38000" dir="5400000" rotWithShape="0">
               <a:srgbClr val="20242E">
@@ -13220,7 +13189,6 @@
               <a:srgbClr val="E4E3DE"/>
             </a:solidFill>
           </a:ln>
-          <a:effectLst/>
           <a:effectLst>
             <a:outerShdw blurRad="90000" dist="38000" dir="5400000" rotWithShape="0">
               <a:srgbClr val="20242E">
@@ -13969,7 +13937,6 @@
               <a:srgbClr val="E4E3DE"/>
             </a:solidFill>
           </a:ln>
-          <a:effectLst/>
           <a:effectLst>
             <a:outerShdw blurRad="90000" dist="38000" dir="5400000" rotWithShape="0">
               <a:srgbClr val="20242E">
@@ -14824,7 +14791,6 @@
               <a:srgbClr val="D64550"/>
             </a:solidFill>
           </a:ln>
-          <a:effectLst/>
           <a:effectLst>
             <a:outerShdw blurRad="90000" dist="38000" dir="5400000" rotWithShape="0">
               <a:srgbClr val="20242E">
@@ -15573,7 +15539,6 @@
               <a:srgbClr val="E4E3DE"/>
             </a:solidFill>
           </a:ln>
-          <a:effectLst/>
           <a:effectLst>
             <a:outerShdw blurRad="90000" dist="38000" dir="5400000" rotWithShape="0">
               <a:srgbClr val="20242E">
@@ -15784,7 +15749,6 @@
               <a:srgbClr val="E4E3DE"/>
             </a:solidFill>
           </a:ln>
-          <a:effectLst/>
           <a:effectLst>
             <a:outerShdw blurRad="90000" dist="38000" dir="5400000" rotWithShape="0">
               <a:srgbClr val="20242E">
@@ -15995,7 +15959,6 @@
               <a:srgbClr val="D64550"/>
             </a:solidFill>
           </a:ln>
-          <a:effectLst/>
           <a:effectLst>
             <a:outerShdw blurRad="90000" dist="38000" dir="5400000" rotWithShape="0">
               <a:srgbClr val="20242E">
@@ -16884,7 +16847,6 @@
               <a:srgbClr val="E4E3DE"/>
             </a:solidFill>
           </a:ln>
-          <a:effectLst/>
           <a:effectLst>
             <a:outerShdw blurRad="90000" dist="38000" dir="5400000" rotWithShape="0">
               <a:srgbClr val="20242E">
@@ -17254,7 +17216,6 @@
               <a:srgbClr val="E4E3DE"/>
             </a:solidFill>
           </a:ln>
-          <a:effectLst/>
           <a:effectLst>
             <a:outerShdw blurRad="90000" dist="38000" dir="5400000" rotWithShape="0">
               <a:srgbClr val="20242E">
@@ -17624,7 +17585,6 @@
               <a:srgbClr val="E4E3DE"/>
             </a:solidFill>
           </a:ln>
-          <a:effectLst/>
           <a:effectLst>
             <a:outerShdw blurRad="90000" dist="38000" dir="5400000" rotWithShape="0">
               <a:srgbClr val="20242E">
@@ -18522,7 +18482,6 @@
               <a:srgbClr val="D64550"/>
             </a:solidFill>
           </a:ln>
-          <a:effectLst/>
           <a:effectLst>
             <a:outerShdw blurRad="90000" dist="38000" dir="5400000" rotWithShape="0">
               <a:srgbClr val="20242E">
@@ -18892,7 +18851,6 @@
               <a:srgbClr val="E4E3DE"/>
             </a:solidFill>
           </a:ln>
-          <a:effectLst/>
           <a:effectLst>
             <a:outerShdw blurRad="90000" dist="38000" dir="5400000" rotWithShape="0">
               <a:srgbClr val="20242E">
@@ -20344,7 +20302,6 @@
               <a:srgbClr val="E4E3DE"/>
             </a:solidFill>
           </a:ln>
-          <a:effectLst/>
           <a:effectLst>
             <a:outerShdw blurRad="90000" dist="38000" dir="5400000" rotWithShape="0">
               <a:srgbClr val="20242E">
@@ -20633,7 +20590,6 @@
               <a:srgbClr val="E4E3DE"/>
             </a:solidFill>
           </a:ln>
-          <a:effectLst/>
           <a:effectLst>
             <a:outerShdw blurRad="90000" dist="38000" dir="5400000" rotWithShape="0">
               <a:srgbClr val="20242E">
@@ -20949,7 +20905,6 @@
               <a:srgbClr val="D64550"/>
             </a:solidFill>
           </a:ln>
-          <a:effectLst/>
           <a:effectLst>
             <a:outerShdw blurRad="90000" dist="38000" dir="5400000" rotWithShape="0">
               <a:srgbClr val="20242E">
@@ -22062,7 +22017,6 @@
               <a:srgbClr val="E4E3DE"/>
             </a:solidFill>
           </a:ln>
-          <a:effectLst/>
           <a:effectLst>
             <a:outerShdw blurRad="90000" dist="38000" dir="5400000" rotWithShape="0">
               <a:srgbClr val="20242E">
@@ -22206,7 +22160,6 @@
               <a:srgbClr val="E4E3DE"/>
             </a:solidFill>
           </a:ln>
-          <a:effectLst/>
           <a:effectLst>
             <a:outerShdw blurRad="90000" dist="38000" dir="5400000" rotWithShape="0">
               <a:srgbClr val="20242E">
@@ -22350,7 +22303,6 @@
               <a:srgbClr val="E4E3DE"/>
             </a:solidFill>
           </a:ln>
-          <a:effectLst/>
           <a:effectLst>
             <a:outerShdw blurRad="90000" dist="38000" dir="5400000" rotWithShape="0">
               <a:srgbClr val="20242E">
@@ -23103,7 +23055,6 @@
               <a:srgbClr val="E4E3DE"/>
             </a:solidFill>
           </a:ln>
-          <a:effectLst/>
           <a:effectLst>
             <a:outerShdw blurRad="90000" dist="38000" dir="5400000" rotWithShape="0">
               <a:srgbClr val="20242E">
